--- a/Quadro_Aulas_Report_2026-06-04.pptx
+++ b/Quadro_Aulas_Report_2026-06-04.pptx
@@ -1038,7 +1038,7 @@
                   <a:srgbClr val="8FA3C0"/>
                 </a:solidFill>
               </a:rPr>
-              <a:t>4 de Junho de 2026 as 09:31</a:t>
+              <a:t>4 de Junho de 2026 as 09:37</a:t>
             </a:r>
             <a:endParaRPr lang="en-US" sz="700" dirty="0"/>
           </a:p>
@@ -2227,7 +2227,7 @@
                   <a:srgbClr val="222222"/>
                 </a:solidFill>
               </a:rPr>
-              <a:t>8 Stories · 3 NFT · 98 itens</a:t>
+              <a:t>8 Stories · 3 NFT · 99 itens</a:t>
             </a:r>
             <a:endParaRPr lang="en-US" sz="750" dirty="0"/>
           </a:p>
@@ -2263,7 +2263,7 @@
                   <a:srgbClr val="222222"/>
                 </a:solidFill>
               </a:rPr>
-              <a:t>A Fazer: 15 . Em progresso: 3 . Finalizados: 80</a:t>
+              <a:t>A Fazer: 15 . Em progresso: 3 . Finalizados: 81</a:t>
             </a:r>
             <a:endParaRPr lang="en-US" sz="750" dirty="0"/>
           </a:p>
@@ -2299,7 +2299,7 @@
                   <a:srgbClr val="222222"/>
                 </a:solidFill>
               </a:rPr>
-              <a:t>Est: 397h . Real: 434.9h . Rem: 30.3h</a:t>
+              <a:t>Est: 397h . Real: 435.9h . Rem: 30.3h</a:t>
             </a:r>
             <a:endParaRPr lang="en-US" sz="750" dirty="0"/>
           </a:p>
@@ -2471,7 +2471,7 @@
                   <a:srgbClr val="888888"/>
                 </a:solidFill>
               </a:rPr>
-              <a:t>Subs: 82% · 80 de 98</a:t>
+              <a:t>Subs: 82% · 81 de 99</a:t>
             </a:r>
             <a:endParaRPr lang="en-US" sz="650" dirty="0"/>
           </a:p>
@@ -2507,7 +2507,7 @@
                   <a:srgbClr val="D97706"/>
                 </a:solidFill>
               </a:rPr>
-              <a:t>Projetado: 465.2h (+68.2h / +17%)</a:t>
+              <a:t>Projetado: 466.2h (+69.2h / +17%)</a:t>
             </a:r>
             <a:endParaRPr lang="en-US" sz="800" dirty="0"/>
           </a:p>
@@ -3117,7 +3117,7 @@
                   <a:srgbClr val="222222"/>
                 </a:solidFill>
               </a:rPr>
-              <a:t>16 Stories · 106 itens</a:t>
+              <a:t>16 Stories · 107 itens</a:t>
             </a:r>
             <a:endParaRPr lang="en-US" sz="750" dirty="0"/>
           </a:p>
@@ -3153,7 +3153,7 @@
                   <a:srgbClr val="222222"/>
                 </a:solidFill>
               </a:rPr>
-              <a:t>A Fazer: 63 . Em progresso: 1 . Finalizados: 42</a:t>
+              <a:t>A Fazer: 63 . Em progresso: 1 . Finalizados: 43</a:t>
             </a:r>
             <a:endParaRPr lang="en-US" sz="750" dirty="0"/>
           </a:p>
@@ -3189,7 +3189,7 @@
                   <a:srgbClr val="222222"/>
                 </a:solidFill>
               </a:rPr>
-              <a:t>Est: 486.5h . Real: 188h . Rem: 282.5h</a:t>
+              <a:t>Est: 488.5h . Real: 188.5h . Rem: 282.5h</a:t>
             </a:r>
             <a:endParaRPr lang="en-US" sz="750" dirty="0"/>
           </a:p>
@@ -3361,7 +3361,7 @@
                   <a:srgbClr val="888888"/>
                 </a:solidFill>
               </a:rPr>
-              <a:t>Subs: 40% · 42 de 106</a:t>
+              <a:t>Subs: 40% · 43 de 107</a:t>
             </a:r>
             <a:endParaRPr lang="en-US" sz="650" dirty="0"/>
           </a:p>
@@ -3397,7 +3397,7 @@
                   <a:srgbClr val="1D9E75"/>
                 </a:solidFill>
               </a:rPr>
-              <a:t>Projetado: 470.5h (-16.0h / -3%)</a:t>
+              <a:t>Projetado: 471h (-17.5h / -4%)</a:t>
             </a:r>
             <a:endParaRPr lang="en-US" sz="800" dirty="0"/>
           </a:p>
@@ -6296,7 +6296,7 @@
                   <a:srgbClr val="222222"/>
                 </a:solidFill>
               </a:rPr>
-              <a:t>Princ +18h · Redund +133h · Obs +7h</a:t>
+              <a:t>Princ +18h · Redund +133h · Obs +9h</a:t>
             </a:r>
             <a:endParaRPr lang="en-US" sz="750" dirty="0"/>
           </a:p>

--- a/Quadro_Aulas_Report_2026-06-04.pptx
+++ b/Quadro_Aulas_Report_2026-06-04.pptx
@@ -1038,7 +1038,7 @@
                   <a:srgbClr val="8FA3C0"/>
                 </a:solidFill>
               </a:rPr>
-              <a:t>4 de Junho de 2026 as 09:37</a:t>
+              <a:t>4 de Junho de 2026 as 09:55</a:t>
             </a:r>
             <a:endParaRPr lang="en-US" sz="700" dirty="0"/>
           </a:p>

--- a/Quadro_Aulas_Report_2026-06-04.pptx
+++ b/Quadro_Aulas_Report_2026-06-04.pptx
@@ -1038,7 +1038,7 @@
                   <a:srgbClr val="8FA3C0"/>
                 </a:solidFill>
               </a:rPr>
-              <a:t>4 de Junho de 2026 as 09:55</a:t>
+              <a:t>4 de Junho de 2026 as 10:23</a:t>
             </a:r>
             <a:endParaRPr lang="en-US" sz="700" dirty="0"/>
           </a:p>
